--- a/~sasano/lecture/fpl/26/fpl8ans.pptx
+++ b/~sasano/lecture/fpl/26/fpl8ans.pptx
@@ -544,14 +544,14 @@
           </a:ln>
           <a:extLst>
             <a:ext uri="{909E8E84-426E-40dd-AFC4-6F175D3DCCD1}">
-              <a14:hiddenFill xmlns="" xmlns:a14="http://schemas.microsoft.com/office/drawing/2010/main">
+              <a14:hiddenFill xmlns:a14="http://schemas.microsoft.com/office/drawing/2010/main" xmlns="">
                 <a:solidFill>
                   <a:srgbClr val="FFFFFF"/>
                 </a:solidFill>
               </a14:hiddenFill>
             </a:ext>
             <a:ext uri="{FAA26D3D-D897-4be2-8F04-BA451C77F1D7}">
-              <ma14:placeholderFlag xmlns="" xmlns:ma14="http://schemas.microsoft.com/office/mac/drawingml/2011/main" val="1"/>
+              <ma14:placeholderFlag xmlns:ma14="http://schemas.microsoft.com/office/mac/drawingml/2011/main" xmlns="" val="1"/>
             </a:ext>
           </a:extLst>
         </p:spPr>
@@ -3822,14 +3822,14 @@
           </a:ln>
           <a:extLst>
             <a:ext uri="{909E8E84-426E-40dd-AFC4-6F175D3DCCD1}">
-              <a14:hiddenFill xmlns="" xmlns:a14="http://schemas.microsoft.com/office/drawing/2010/main">
+              <a14:hiddenFill xmlns:a14="http://schemas.microsoft.com/office/drawing/2010/main" xmlns="">
                 <a:solidFill>
                   <a:srgbClr val="FFFFFF"/>
                 </a:solidFill>
               </a14:hiddenFill>
             </a:ext>
             <a:ext uri="{91240B29-F687-4f45-9708-019B960494DF}">
-              <a14:hiddenLine xmlns="" xmlns:a14="http://schemas.microsoft.com/office/drawing/2010/main" w="9525">
+              <a14:hiddenLine xmlns:a14="http://schemas.microsoft.com/office/drawing/2010/main" xmlns="" w="9525">
                 <a:solidFill>
                   <a:srgbClr val="000000"/>
                 </a:solidFill>
@@ -3839,7 +3839,7 @@
               </a14:hiddenLine>
             </a:ext>
             <a:ext uri="{FAA26D3D-D897-4be2-8F04-BA451C77F1D7}">
-              <ma14:placeholderFlag xmlns="" xmlns:ma14="http://schemas.microsoft.com/office/mac/drawingml/2011/main" val="1"/>
+              <ma14:placeholderFlag xmlns:ma14="http://schemas.microsoft.com/office/mac/drawingml/2011/main" xmlns="" val="1"/>
             </a:ext>
           </a:extLst>
         </p:spPr>
@@ -3883,14 +3883,14 @@
           </a:ln>
           <a:extLst>
             <a:ext uri="{909E8E84-426E-40dd-AFC4-6F175D3DCCD1}">
-              <a14:hiddenFill xmlns="" xmlns:a14="http://schemas.microsoft.com/office/drawing/2010/main">
+              <a14:hiddenFill xmlns:a14="http://schemas.microsoft.com/office/drawing/2010/main" xmlns="">
                 <a:solidFill>
                   <a:srgbClr val="FFFFFF"/>
                 </a:solidFill>
               </a14:hiddenFill>
             </a:ext>
             <a:ext uri="{91240B29-F687-4f45-9708-019B960494DF}">
-              <a14:hiddenLine xmlns="" xmlns:a14="http://schemas.microsoft.com/office/drawing/2010/main" w="9525">
+              <a14:hiddenLine xmlns:a14="http://schemas.microsoft.com/office/drawing/2010/main" xmlns="" w="9525">
                 <a:solidFill>
                   <a:srgbClr val="000000"/>
                 </a:solidFill>
@@ -3900,7 +3900,7 @@
               </a14:hiddenLine>
             </a:ext>
             <a:ext uri="{FAA26D3D-D897-4be2-8F04-BA451C77F1D7}">
-              <ma14:placeholderFlag xmlns="" xmlns:ma14="http://schemas.microsoft.com/office/mac/drawingml/2011/main" val="1"/>
+              <ma14:placeholderFlag xmlns:ma14="http://schemas.microsoft.com/office/mac/drawingml/2011/main" xmlns="" val="1"/>
             </a:ext>
           </a:extLst>
         </p:spPr>
@@ -4636,56 +4636,6 @@
                 <a:schemeClr val="tx1"/>
               </a:solidFill>
             </a:endParaRPr>
-          </a:p>
-        </p:txBody>
-      </p:sp>
-      <p:sp>
-        <p:nvSpPr>
-          <p:cNvPr id="7" name="テキスト ボックス 6"/>
-          <p:cNvSpPr txBox="1"/>
-          <p:nvPr/>
-        </p:nvSpPr>
-        <p:spPr>
-          <a:xfrm>
-            <a:off x="755576" y="4365104"/>
-            <a:ext cx="7776863" cy="1077218"/>
-          </a:xfrm>
-          <a:prstGeom prst="rect">
-            <a:avLst/>
-          </a:prstGeom>
-          <a:noFill/>
-        </p:spPr>
-        <p:txBody>
-          <a:bodyPr wrap="square" rtlCol="0">
-            <a:spAutoFit/>
-          </a:bodyPr>
-          <a:lstStyle/>
-          <a:p>
-            <a:pPr algn="ctr"/>
-            <a:r>
-              <a:rPr kumimoji="1" lang="en-US" altLang="ja-JP" sz="3200" b="0" dirty="0"/>
-              <a:t>Department of </a:t>
-            </a:r>
-          </a:p>
-          <a:p>
-            <a:pPr algn="ctr"/>
-            <a:r>
-              <a:rPr lang="en-US" altLang="ja-JP" sz="3200" b="0" dirty="0"/>
-              <a:t>Computer </a:t>
-            </a:r>
-            <a:r>
-              <a:rPr kumimoji="1" lang="en-US" altLang="ja-JP" sz="3200" b="0" dirty="0"/>
-              <a:t>Science and </a:t>
-            </a:r>
-            <a:r>
-              <a:rPr lang="en-US" altLang="ja-JP" sz="3200" b="0" dirty="0"/>
-              <a:t>Engineering</a:t>
-            </a:r>
-            <a:r>
-              <a:rPr kumimoji="1" lang="en-US" altLang="ja-JP" sz="3200" b="0" dirty="0"/>
-              <a:t> </a:t>
-            </a:r>
-            <a:endParaRPr kumimoji="1" lang="ja-JP" altLang="en-US" sz="3200" b="0" dirty="0"/>
           </a:p>
         </p:txBody>
       </p:sp>
